--- a/納品レポート/ホテル別レポート/変なホテル東京羽田_口コミ分析レポート.pptx
+++ b/納品レポート/ホテル別レポート/変なホテル東京羽田_口コミ分析レポート.pptx
@@ -183,10 +183,10 @@
                     <c:v>Trip.com</c:v>
                   </c:pt>
                   <c:pt idx="1">
-                    <c:v>楽天トラベル</c:v>
+                    <c:v>じゃらん</c:v>
                   </c:pt>
                   <c:pt idx="2">
-                    <c:v>じゃらん</c:v>
+                    <c:v>楽天トラベル</c:v>
                   </c:pt>
                   <c:pt idx="3">
                     <c:v>Agoda</c:v>
@@ -208,22 +208,22 @@
                 <c:formatCode>General</c:formatCode>
                 <c:ptCount val="6"/>
                 <c:pt idx="0">
-                  <c:v>9.4</c:v>
+                  <c:v>9.56</c:v>
                 </c:pt>
                 <c:pt idx="1">
-                  <c:v>8.57</c:v>
+                  <c:v>8.75</c:v>
                 </c:pt>
                 <c:pt idx="2">
-                  <c:v>8.38</c:v>
+                  <c:v>8.63</c:v>
                 </c:pt>
                 <c:pt idx="3">
-                  <c:v>8.2</c:v>
+                  <c:v>8.4</c:v>
                 </c:pt>
                 <c:pt idx="4">
-                  <c:v>8.15</c:v>
+                  <c:v>8.23</c:v>
                 </c:pt>
                 <c:pt idx="5">
-                  <c:v>8.15</c:v>
+                  <c:v>8</c:v>
                 </c:pt>
               </c:numCache>
             </c:numRef>
@@ -528,10 +528,10 @@
               <c:numCache>
                 <c:ptCount val="2"/>
                 <c:pt idx="0">
-                  <c:v>268</c:v>
+                  <c:v>126</c:v>
                 </c:pt>
                 <c:pt idx="1">
-                  <c:v>71</c:v>
+                  <c:v>31</c:v>
                 </c:pt>
               </c:numCache>
             </c:numRef>
@@ -782,31 +782,31 @@
                 <c:formatCode>General</c:formatCode>
                 <c:ptCount val="9"/>
                 <c:pt idx="0">
-                  <c:v>121</c:v>
+                  <c:v>61</c:v>
                 </c:pt>
                 <c:pt idx="1">
-                  <c:v>45</c:v>
+                  <c:v>23</c:v>
                 </c:pt>
                 <c:pt idx="2">
-                  <c:v>102</c:v>
+                  <c:v>42</c:v>
                 </c:pt>
                 <c:pt idx="3">
-                  <c:v>33</c:v>
+                  <c:v>16</c:v>
                 </c:pt>
                 <c:pt idx="4">
-                  <c:v>29</c:v>
+                  <c:v>11</c:v>
                 </c:pt>
                 <c:pt idx="5">
-                  <c:v>9</c:v>
+                  <c:v>4</c:v>
                 </c:pt>
                 <c:pt idx="6">
                   <c:v>2</c:v>
                 </c:pt>
                 <c:pt idx="7">
-                  <c:v>2</c:v>
+                  <c:v>1</c:v>
                 </c:pt>
                 <c:pt idx="8">
-                  <c:v>7</c:v>
+                  <c:v>4</c:v>
                 </c:pt>
               </c:numCache>
             </c:numRef>
@@ -2737,7 +2737,7 @@
                 <a:ea typeface="Arial" pitchFamily="34" charset="-122"/>
                 <a:cs typeface="Arial" pitchFamily="34" charset="-120"/>
               </a:rPr>
-              <a:t>分析対象期間：2025年12月〜2026年3月</a:t>
+              <a:t>分析対象期間：2025年12月〜2026年4月</a:t>
             </a:r>
             <a:endParaRPr lang="en-US" sz="1000" dirty="0"/>
           </a:p>
@@ -2757,7 +2757,7 @@
                 <a:ea typeface="Arial" pitchFamily="34" charset="-122"/>
                 <a:cs typeface="Arial" pitchFamily="34" charset="-120"/>
               </a:rPr>
-              <a:t>レビュー総数：350件</a:t>
+              <a:t>レビュー総数：164件</a:t>
             </a:r>
             <a:endParaRPr lang="en-US" sz="1000" dirty="0"/>
           </a:p>
@@ -2777,7 +2777,7 @@
                 <a:ea typeface="Arial" pitchFamily="34" charset="-122"/>
                 <a:cs typeface="Arial" pitchFamily="34" charset="-120"/>
               </a:rPr>
-              <a:t>作成日：2026年4月3日</a:t>
+              <a:t>作成日：2026年4月12日</a:t>
             </a:r>
             <a:endParaRPr lang="en-US" sz="1000" dirty="0"/>
           </a:p>
@@ -2956,7 +2956,7 @@
                 <a:ea typeface="Arial" pitchFamily="34" charset="-122"/>
                 <a:cs typeface="Arial" pitchFamily="34" charset="-120"/>
               </a:rPr>
-              <a:t>変なホテル東京羽田の2025年12月〜2026年3月口コミ分析（350件）では、総合評価8.31点（10pt換算）、高評価率76.6%という結果が得られました。</a:t>
+              <a:t>変なホテル東京羽田の2025年12月〜2026年4月口コミ分析（164件）では、総合評価8.35点（10pt換算）、高評価率76.8%という結果が得られました。</a:t>
             </a:r>
             <a:endParaRPr lang="en-US" sz="1200" dirty="0"/>
           </a:p>
@@ -3014,7 +3014,7 @@
                 <a:ea typeface="Arial" pitchFamily="34" charset="-122"/>
                 <a:cs typeface="Arial" pitchFamily="34" charset="-120"/>
               </a:rPr>
-              <a:t>6ヶ月以内に全体平均8.6点以上、高評価率82%以上を目指し、継続的な改善サイクルを確立することを推奨します。</a:t>
+              <a:t>6ヶ月以内に全体平均8.7点以上、高評価率82%以上を目指し、継続的な改善サイクルを確立することを推奨します。</a:t>
             </a:r>
             <a:endParaRPr lang="en-US" sz="1200" dirty="0"/>
           </a:p>
@@ -3360,7 +3360,7 @@
                 <a:ea typeface="Arial" pitchFamily="34" charset="-122"/>
                 <a:cs typeface="Arial" pitchFamily="34" charset="-120"/>
               </a:rPr>
-              <a:t>8.31</a:t>
+              <a:t>8.35</a:t>
             </a:r>
             <a:endParaRPr lang="en-US" sz="3200" dirty="0"/>
           </a:p>
@@ -3485,7 +3485,7 @@
                 <a:ea typeface="Arial" pitchFamily="34" charset="-122"/>
                 <a:cs typeface="Arial" pitchFamily="34" charset="-120"/>
               </a:rPr>
-              <a:t>76.6%</a:t>
+              <a:t>76.8%</a:t>
             </a:r>
             <a:endParaRPr lang="en-US" sz="3200" dirty="0"/>
           </a:p>
@@ -3610,7 +3610,7 @@
                 <a:ea typeface="Arial" pitchFamily="34" charset="-122"/>
                 <a:cs typeface="Arial" pitchFamily="34" charset="-120"/>
               </a:rPr>
-              <a:t>3.1%</a:t>
+              <a:t>4.3%</a:t>
             </a:r>
             <a:endParaRPr lang="en-US" sz="3200" dirty="0"/>
           </a:p>
@@ -3735,7 +3735,7 @@
                 <a:ea typeface="Arial" pitchFamily="34" charset="-122"/>
                 <a:cs typeface="Arial" pitchFamily="34" charset="-120"/>
               </a:rPr>
-              <a:t>350件</a:t>
+              <a:t>164件</a:t>
             </a:r>
             <a:endParaRPr lang="en-US" sz="3200" dirty="0"/>
           </a:p>
@@ -3883,7 +3883,7 @@
                 <a:ea typeface="Arial" pitchFamily="34" charset="-122"/>
                 <a:cs typeface="Arial" pitchFamily="34" charset="-120"/>
               </a:rPr>
-              <a:t>  客室の快適性・設備の充実度への好評（196件）</a:t>
+              <a:t>  客室の快適性・設備の充実度への好評（81件）</a:t>
             </a:r>
             <a:endParaRPr lang="en-US" sz="1100" dirty="0"/>
           </a:p>
@@ -3923,7 +3923,7 @@
                 <a:ea typeface="Arial" pitchFamily="34" charset="-122"/>
                 <a:cs typeface="Arial" pitchFamily="34" charset="-120"/>
               </a:rPr>
-              <a:t>  駅近・交通利便性に関する好評価（127件）</a:t>
+              <a:t>  駅近・交通利便性に関する好評価（50件）</a:t>
             </a:r>
             <a:endParaRPr lang="en-US" sz="1100" dirty="0"/>
           </a:p>
@@ -3963,7 +3963,7 @@
                 <a:ea typeface="Arial" pitchFamily="34" charset="-122"/>
                 <a:cs typeface="Arial" pitchFamily="34" charset="-120"/>
               </a:rPr>
-              <a:t>  フロントスタッフの丁寧な対応への好評（109件）</a:t>
+              <a:t>  フロントスタッフの丁寧な対応への好評（46件）</a:t>
             </a:r>
             <a:endParaRPr lang="en-US" sz="1100" dirty="0"/>
           </a:p>
@@ -4111,7 +4111,7 @@
                 <a:ea typeface="Arial" pitchFamily="34" charset="-122"/>
                 <a:cs typeface="Arial" pitchFamily="34" charset="-120"/>
               </a:rPr>
-              <a:t>  5件の指摘あり。改善対応を推奨</a:t>
+              <a:t>  2件の指摘あり。改善対応を推奨</a:t>
             </a:r>
             <a:endParaRPr lang="en-US" sz="1100" dirty="0"/>
           </a:p>
@@ -4151,7 +4151,7 @@
                 <a:ea typeface="Arial" pitchFamily="34" charset="-122"/>
                 <a:cs typeface="Arial" pitchFamily="34" charset="-120"/>
               </a:rPr>
-              <a:t>  2件の指摘あり。改善対応を推奨</a:t>
+              <a:t>  1件の指摘あり。改善対応を推奨</a:t>
             </a:r>
             <a:endParaRPr lang="en-US" sz="1100" dirty="0"/>
           </a:p>
@@ -4191,7 +4191,7 @@
                 <a:ea typeface="Arial" pitchFamily="34" charset="-122"/>
                 <a:cs typeface="Arial" pitchFamily="34" charset="-120"/>
               </a:rPr>
-              <a:t>  2件の指摘あり。改善対応を推奨</a:t>
+              <a:t>  1件の指摘あり。改善対応を推奨</a:t>
             </a:r>
             <a:endParaRPr lang="en-US" sz="1100" dirty="0"/>
           </a:p>
@@ -4612,7 +4612,7 @@
                 <a:ea typeface="Arial" pitchFamily="34" charset="-122"/>
                 <a:cs typeface="Arial" pitchFamily="34" charset="-120"/>
               </a:rPr>
-              <a:t>Trip.com: 9.40点</a:t>
+              <a:t>Trip.com: 9.56点</a:t>
             </a:r>
             <a:endParaRPr lang="en-US" sz="1100" dirty="0"/>
           </a:p>
@@ -4661,7 +4661,7 @@
                 <a:ea typeface="Arial" pitchFamily="34" charset="-122"/>
                 <a:cs typeface="Arial" pitchFamily="34" charset="-120"/>
               </a:rPr>
-              <a:t>8.31点（10pt換算）</a:t>
+              <a:t>8.35点（10pt換算）</a:t>
             </a:r>
             <a:endParaRPr lang="en-US" sz="1100" dirty="0"/>
           </a:p>
@@ -5170,7 +5170,7 @@
                           <a:ea typeface="Arial" pitchFamily="34" charset="-122"/>
                           <a:cs typeface="Arial" pitchFamily="34" charset="-120"/>
                         </a:rPr>
-                        <a:t>25</a:t>
+                        <a:t>9</a:t>
                       </a:r>
                       <a:endParaRPr lang="en-US" sz="900" dirty="0">
                         <a:latin typeface="Arial" charset="0"/>
@@ -5238,7 +5238,7 @@
                           <a:ea typeface="Arial" pitchFamily="34" charset="-122"/>
                           <a:cs typeface="Arial" pitchFamily="34" charset="-120"/>
                         </a:rPr>
-                        <a:t>9.40</a:t>
+                        <a:t>9.56</a:t>
                       </a:r>
                       <a:endParaRPr lang="en-US" sz="900" dirty="0">
                         <a:latin typeface="Arial" charset="0"/>
@@ -5374,7 +5374,7 @@
                           <a:ea typeface="Arial" pitchFamily="34" charset="-122"/>
                           <a:cs typeface="Arial" pitchFamily="34" charset="-120"/>
                         </a:rPr>
-                        <a:t>9.40</a:t>
+                        <a:t>9.56</a:t>
                       </a:r>
                       <a:endParaRPr lang="en-US" sz="900" dirty="0">
                         <a:latin typeface="Arial" charset="0"/>
@@ -5444,7 +5444,7 @@
                           <a:ea typeface="Arial" pitchFamily="34" charset="-122"/>
                           <a:cs typeface="Arial" pitchFamily="34" charset="-120"/>
                         </a:rPr>
-                        <a:t>楽天トラベル</a:t>
+                        <a:t>じゃらん</a:t>
                       </a:r>
                       <a:endParaRPr lang="en-US" sz="900" dirty="0">
                         <a:latin typeface="Arial" charset="0"/>
@@ -5512,7 +5512,7 @@
                           <a:ea typeface="Arial" pitchFamily="34" charset="-122"/>
                           <a:cs typeface="Arial" pitchFamily="34" charset="-120"/>
                         </a:rPr>
-                        <a:t>42</a:t>
+                        <a:t>8</a:t>
                       </a:r>
                       <a:endParaRPr lang="en-US" sz="900" dirty="0">
                         <a:latin typeface="Arial" charset="0"/>
@@ -5580,7 +5580,7 @@
                           <a:ea typeface="Arial" pitchFamily="34" charset="-122"/>
                           <a:cs typeface="Arial" pitchFamily="34" charset="-120"/>
                         </a:rPr>
-                        <a:t>4.29</a:t>
+                        <a:t>4.38</a:t>
                       </a:r>
                       <a:endParaRPr lang="en-US" sz="900" dirty="0">
                         <a:latin typeface="Arial" charset="0"/>
@@ -5716,7 +5716,7 @@
                           <a:ea typeface="Arial" pitchFamily="34" charset="-122"/>
                           <a:cs typeface="Arial" pitchFamily="34" charset="-120"/>
                         </a:rPr>
-                        <a:t>8.57</a:t>
+                        <a:t>8.75</a:t>
                       </a:r>
                       <a:endParaRPr lang="en-US" sz="900" dirty="0">
                         <a:latin typeface="Arial" charset="0"/>
@@ -5786,7 +5786,7 @@
                           <a:ea typeface="Arial" pitchFamily="34" charset="-122"/>
                           <a:cs typeface="Arial" pitchFamily="34" charset="-120"/>
                         </a:rPr>
-                        <a:t>じゃらん</a:t>
+                        <a:t>楽天トラベル</a:t>
                       </a:r>
                       <a:endParaRPr lang="en-US" sz="900" dirty="0">
                         <a:latin typeface="Arial" charset="0"/>
@@ -5854,7 +5854,7 @@
                           <a:ea typeface="Arial" pitchFamily="34" charset="-122"/>
                           <a:cs typeface="Arial" pitchFamily="34" charset="-120"/>
                         </a:rPr>
-                        <a:t>26</a:t>
+                        <a:t>19</a:t>
                       </a:r>
                       <a:endParaRPr lang="en-US" sz="900" dirty="0">
                         <a:latin typeface="Arial" charset="0"/>
@@ -5922,7 +5922,7 @@
                           <a:ea typeface="Arial" pitchFamily="34" charset="-122"/>
                           <a:cs typeface="Arial" pitchFamily="34" charset="-120"/>
                         </a:rPr>
-                        <a:t>4.19</a:t>
+                        <a:t>4.32</a:t>
                       </a:r>
                       <a:endParaRPr lang="en-US" sz="900" dirty="0">
                         <a:latin typeface="Arial" charset="0"/>
@@ -6058,7 +6058,7 @@
                           <a:ea typeface="Arial" pitchFamily="34" charset="-122"/>
                           <a:cs typeface="Arial" pitchFamily="34" charset="-120"/>
                         </a:rPr>
-                        <a:t>8.38</a:t>
+                        <a:t>8.63</a:t>
                       </a:r>
                       <a:endParaRPr lang="en-US" sz="900" dirty="0">
                         <a:latin typeface="Arial" charset="0"/>
@@ -6196,7 +6196,7 @@
                           <a:ea typeface="Arial" pitchFamily="34" charset="-122"/>
                           <a:cs typeface="Arial" pitchFamily="34" charset="-120"/>
                         </a:rPr>
-                        <a:t>40</a:t>
+                        <a:t>20</a:t>
                       </a:r>
                       <a:endParaRPr lang="en-US" sz="900" dirty="0">
                         <a:latin typeface="Arial" charset="0"/>
@@ -6264,7 +6264,7 @@
                           <a:ea typeface="Arial" pitchFamily="34" charset="-122"/>
                           <a:cs typeface="Arial" pitchFamily="34" charset="-120"/>
                         </a:rPr>
-                        <a:t>8.20</a:t>
+                        <a:t>8.40</a:t>
                       </a:r>
                       <a:endParaRPr lang="en-US" sz="900" dirty="0">
                         <a:latin typeface="Arial" charset="0"/>
@@ -6400,7 +6400,7 @@
                           <a:ea typeface="Arial" pitchFamily="34" charset="-122"/>
                           <a:cs typeface="Arial" pitchFamily="34" charset="-120"/>
                         </a:rPr>
-                        <a:t>8.20</a:t>
+                        <a:t>8.40</a:t>
                       </a:r>
                       <a:endParaRPr lang="en-US" sz="900" dirty="0">
                         <a:latin typeface="Arial" charset="0"/>
@@ -6538,7 +6538,7 @@
                           <a:ea typeface="Arial" pitchFamily="34" charset="-122"/>
                           <a:cs typeface="Arial" pitchFamily="34" charset="-120"/>
                         </a:rPr>
-                        <a:t>151</a:t>
+                        <a:t>78</a:t>
                       </a:r>
                       <a:endParaRPr lang="en-US" sz="900" dirty="0">
                         <a:latin typeface="Arial" charset="0"/>
@@ -6606,7 +6606,7 @@
                           <a:ea typeface="Arial" pitchFamily="34" charset="-122"/>
                           <a:cs typeface="Arial" pitchFamily="34" charset="-120"/>
                         </a:rPr>
-                        <a:t>8.15</a:t>
+                        <a:t>8.23</a:t>
                       </a:r>
                       <a:endParaRPr lang="en-US" sz="900" dirty="0">
                         <a:latin typeface="Arial" charset="0"/>
@@ -6742,7 +6742,7 @@
                           <a:ea typeface="Arial" pitchFamily="34" charset="-122"/>
                           <a:cs typeface="Arial" pitchFamily="34" charset="-120"/>
                         </a:rPr>
-                        <a:t>8.15</a:t>
+                        <a:t>8.23</a:t>
                       </a:r>
                       <a:endParaRPr lang="en-US" sz="900" dirty="0">
                         <a:latin typeface="Arial" charset="0"/>
@@ -6880,7 +6880,7 @@
                           <a:ea typeface="Arial" pitchFamily="34" charset="-122"/>
                           <a:cs typeface="Arial" pitchFamily="34" charset="-120"/>
                         </a:rPr>
-                        <a:t>66</a:t>
+                        <a:t>30</a:t>
                       </a:r>
                       <a:endParaRPr lang="en-US" sz="900" dirty="0">
                         <a:latin typeface="Arial" charset="0"/>
@@ -6948,7 +6948,7 @@
                           <a:ea typeface="Arial" pitchFamily="34" charset="-122"/>
                           <a:cs typeface="Arial" pitchFamily="34" charset="-120"/>
                         </a:rPr>
-                        <a:t>4.08</a:t>
+                        <a:t>4.00</a:t>
                       </a:r>
                       <a:endParaRPr lang="en-US" sz="900" dirty="0">
                         <a:latin typeface="Arial" charset="0"/>
@@ -7084,7 +7084,7 @@
                           <a:ea typeface="Arial" pitchFamily="34" charset="-122"/>
                           <a:cs typeface="Arial" pitchFamily="34" charset="-120"/>
                         </a:rPr>
-                        <a:t>8.15</a:t>
+                        <a:t>8.00</a:t>
                       </a:r>
                       <a:endParaRPr lang="en-US" sz="900" dirty="0">
                         <a:latin typeface="Arial" charset="0"/>
@@ -7492,7 +7492,7 @@
                 <a:ea typeface="Arial" pitchFamily="34" charset="-122"/>
                 <a:cs typeface="Arial" pitchFamily="34" charset="-120"/>
               </a:rPr>
-              <a:t>268件（76.6%）</a:t>
+              <a:t>126件（76.8%）</a:t>
             </a:r>
             <a:endParaRPr lang="en-US" sz="1100" dirty="0"/>
           </a:p>
@@ -7590,7 +7590,7 @@
                 <a:ea typeface="Arial" pitchFamily="34" charset="-122"/>
                 <a:cs typeface="Arial" pitchFamily="34" charset="-120"/>
               </a:rPr>
-              <a:t>71件（20.3%）</a:t>
+              <a:t>31件（18.9%）</a:t>
             </a:r>
             <a:endParaRPr lang="en-US" sz="1100" dirty="0"/>
           </a:p>
@@ -7688,7 +7688,7 @@
                 <a:ea typeface="Arial" pitchFamily="34" charset="-122"/>
                 <a:cs typeface="Arial" pitchFamily="34" charset="-120"/>
               </a:rPr>
-              <a:t>11件（3.1%）</a:t>
+              <a:t>7件（4.3%）</a:t>
             </a:r>
             <a:endParaRPr lang="en-US" sz="1100" dirty="0"/>
           </a:p>
@@ -8022,7 +8022,7 @@
                 <a:ea typeface="Arial" pitchFamily="34" charset="-122"/>
                 <a:cs typeface="Arial" pitchFamily="34" charset="-120"/>
               </a:rPr>
-              <a:t>196件</a:t>
+              <a:t>81件</a:t>
             </a:r>
             <a:endParaRPr lang="en-US" sz="900" dirty="0"/>
           </a:p>
@@ -8245,7 +8245,7 @@
                 <a:ea typeface="Arial" pitchFamily="34" charset="-122"/>
                 <a:cs typeface="Arial" pitchFamily="34" charset="-120"/>
               </a:rPr>
-              <a:t>127件</a:t>
+              <a:t>50件</a:t>
             </a:r>
             <a:endParaRPr lang="en-US" sz="900" dirty="0"/>
           </a:p>
@@ -8468,7 +8468,7 @@
                 <a:ea typeface="Arial" pitchFamily="34" charset="-122"/>
                 <a:cs typeface="Arial" pitchFamily="34" charset="-120"/>
               </a:rPr>
-              <a:t>109件</a:t>
+              <a:t>46件</a:t>
             </a:r>
             <a:endParaRPr lang="en-US" sz="900" dirty="0"/>
           </a:p>
@@ -8691,7 +8691,7 @@
                 <a:ea typeface="Arial" pitchFamily="34" charset="-122"/>
                 <a:cs typeface="Arial" pitchFamily="34" charset="-120"/>
               </a:rPr>
-              <a:t>89件</a:t>
+              <a:t>43件</a:t>
             </a:r>
             <a:endParaRPr lang="en-US" sz="900" dirty="0"/>
           </a:p>
@@ -8914,7 +8914,7 @@
                 <a:ea typeface="Arial" pitchFamily="34" charset="-122"/>
                 <a:cs typeface="Arial" pitchFamily="34" charset="-120"/>
               </a:rPr>
-              <a:t>40件</a:t>
+              <a:t>20件</a:t>
             </a:r>
             <a:endParaRPr lang="en-US" sz="900" dirty="0"/>
           </a:p>
@@ -9137,7 +9137,7 @@
                 <a:ea typeface="Arial" pitchFamily="34" charset="-122"/>
                 <a:cs typeface="Arial" pitchFamily="34" charset="-120"/>
               </a:rPr>
-              <a:t>38件</a:t>
+              <a:t>13件</a:t>
             </a:r>
             <a:endParaRPr lang="en-US" sz="900" dirty="0"/>
           </a:p>
@@ -9802,13 +9802,13 @@
                       <a:r>
                         <a:rPr lang="en-US" sz="1200" b="1" dirty="0">
                           <a:solidFill>
-                            <a:srgbClr val="DC2626"/>
+                            <a:srgbClr val="EA580C"/>
                           </a:solidFill>
                           <a:latin typeface="Arial" pitchFamily="34" charset="0"/>
                           <a:ea typeface="Arial" pitchFamily="34" charset="-122"/>
                           <a:cs typeface="Arial" pitchFamily="34" charset="-120"/>
                         </a:rPr>
-                        <a:t>S</a:t>
+                        <a:t>A</a:t>
                       </a:r>
                       <a:endParaRPr lang="en-US" sz="1200" dirty="0">
                         <a:latin typeface="Arial" charset="0"/>
@@ -10012,7 +10012,7 @@
                           <a:ea typeface="Arial" pitchFamily="34" charset="-122"/>
                           <a:cs typeface="Arial" pitchFamily="34" charset="-120"/>
                         </a:rPr>
-                        <a:t>5件</a:t>
+                        <a:t>2件</a:t>
                       </a:r>
                       <a:endParaRPr lang="en-US" sz="900" dirty="0">
                         <a:latin typeface="Arial" charset="0"/>
@@ -10076,13 +10076,13 @@
                       <a:r>
                         <a:rPr lang="en-US" sz="1200" b="1" dirty="0">
                           <a:solidFill>
-                            <a:srgbClr val="EA580C"/>
+                            <a:srgbClr val="D4A843"/>
                           </a:solidFill>
                           <a:latin typeface="Arial" pitchFamily="34" charset="0"/>
                           <a:ea typeface="Arial" pitchFamily="34" charset="-122"/>
                           <a:cs typeface="Arial" pitchFamily="34" charset="-120"/>
                         </a:rPr>
-                        <a:t>A</a:t>
+                        <a:t>B</a:t>
                       </a:r>
                       <a:endParaRPr lang="en-US" sz="1200" dirty="0">
                         <a:latin typeface="Arial" charset="0"/>
@@ -10286,7 +10286,7 @@
                           <a:ea typeface="Arial" pitchFamily="34" charset="-122"/>
                           <a:cs typeface="Arial" pitchFamily="34" charset="-120"/>
                         </a:rPr>
-                        <a:t>2件</a:t>
+                        <a:t>1件</a:t>
                       </a:r>
                       <a:endParaRPr lang="en-US" sz="900" dirty="0">
                         <a:latin typeface="Arial" charset="0"/>
@@ -10560,7 +10560,7 @@
                           <a:ea typeface="Arial" pitchFamily="34" charset="-122"/>
                           <a:cs typeface="Arial" pitchFamily="34" charset="-120"/>
                         </a:rPr>
-                        <a:t>2件</a:t>
+                        <a:t>1件</a:t>
                       </a:r>
                       <a:endParaRPr lang="en-US" sz="900" dirty="0">
                         <a:latin typeface="Arial" charset="0"/>
@@ -10698,7 +10698,7 @@
                           <a:ea typeface="Arial" pitchFamily="34" charset="-122"/>
                           <a:cs typeface="Arial" pitchFamily="34" charset="-120"/>
                         </a:rPr>
-                        <a:t>部屋狭小感</a:t>
+                        <a:t>駐車場・立地</a:t>
                       </a:r>
                       <a:endParaRPr lang="en-US" sz="900" dirty="0">
                         <a:latin typeface="Arial" charset="0"/>
@@ -10766,7 +10766,7 @@
                           <a:ea typeface="Arial" pitchFamily="34" charset="-122"/>
                           <a:cs typeface="Arial" pitchFamily="34" charset="-120"/>
                         </a:rPr>
-                        <a:t>狭い部屋スペース</a:t>
+                        <a:t>私のように名前が長い場合（名字が3つと長い姓が1つ）、自動チェックイン機能は全く</a:t>
                       </a:r>
                       <a:endParaRPr lang="en-US" sz="900" dirty="0">
                         <a:latin typeface="Arial" charset="0"/>
@@ -10886,554 +10886,6 @@
                   </a:tcPr>
                 </a:tc>
               </a:tr>
-              <a:tr h="320040">
-                <a:tc>
-                  <a:txBody>
-                    <a:bodyPr/>
-                    <a:lstStyle/>
-                    <a:p>
-                      <a:pPr algn="ctr" indent="0" marL="0">
-                        <a:buNone/>
-                      </a:pPr>
-                      <a:r>
-                        <a:rPr lang="en-US" sz="1200" b="1" dirty="0">
-                          <a:solidFill>
-                            <a:srgbClr val="D4A843"/>
-                          </a:solidFill>
-                          <a:latin typeface="Arial" pitchFamily="34" charset="0"/>
-                          <a:ea typeface="Arial" pitchFamily="34" charset="-122"/>
-                          <a:cs typeface="Arial" pitchFamily="34" charset="-120"/>
-                        </a:rPr>
-                        <a:t>B</a:t>
-                      </a:r>
-                      <a:endParaRPr lang="en-US" sz="1200" dirty="0">
-                        <a:latin typeface="Arial" charset="0"/>
-                        <a:ea typeface="Arial" charset="0"/>
-                        <a:cs typeface="Arial" charset="0"/>
-                      </a:endParaRPr>
-                    </a:p>
-                  </a:txBody>
-                  <a:tcPr marL="91440" marR="91440" marT="45720" marB="45720">
-                    <a:lnL w="6350" cap="flat" cmpd="sng" algn="ctr">
-                      <a:solidFill>
-                        <a:srgbClr val="CBD5E1"/>
-                      </a:solidFill>
-                      <a:prstDash val="solid"/>
-                      <a:round/>
-                      <a:headEnd type="none" w="med" len="med"/>
-                      <a:tailEnd type="none" w="med" len="med"/>
-                    </a:lnL>
-                    <a:lnR w="6350" cap="flat" cmpd="sng" algn="ctr">
-                      <a:solidFill>
-                        <a:srgbClr val="CBD5E1"/>
-                      </a:solidFill>
-                      <a:prstDash val="solid"/>
-                      <a:round/>
-                      <a:headEnd type="none" w="med" len="med"/>
-                      <a:tailEnd type="none" w="med" len="med"/>
-                    </a:lnR>
-                    <a:lnT w="6350" cap="flat" cmpd="sng" algn="ctr">
-                      <a:solidFill>
-                        <a:srgbClr val="CBD5E1"/>
-                      </a:solidFill>
-                      <a:prstDash val="solid"/>
-                      <a:round/>
-                      <a:headEnd type="none" w="med" len="med"/>
-                      <a:tailEnd type="none" w="med" len="med"/>
-                    </a:lnT>
-                    <a:lnB w="6350" cap="flat" cmpd="sng" algn="ctr">
-                      <a:solidFill>
-                        <a:srgbClr val="CBD5E1"/>
-                      </a:solidFill>
-                      <a:prstDash val="solid"/>
-                      <a:round/>
-                      <a:headEnd type="none" w="med" len="med"/>
-                      <a:tailEnd type="none" w="med" len="med"/>
-                    </a:lnB>
-                    <a:solidFill>
-                      <a:srgbClr val="E8EFF8"/>
-                    </a:solidFill>
-                  </a:tcPr>
-                </a:tc>
-                <a:tc>
-                  <a:txBody>
-                    <a:bodyPr/>
-                    <a:lstStyle/>
-                    <a:p>
-                      <a:pPr indent="0" marL="0">
-                        <a:buNone/>
-                      </a:pPr>
-                      <a:r>
-                        <a:rPr lang="en-US" sz="900" b="1" dirty="0">
-                          <a:solidFill>
-                            <a:srgbClr val="334155"/>
-                          </a:solidFill>
-                          <a:latin typeface="Arial" pitchFamily="34" charset="0"/>
-                          <a:ea typeface="Arial" pitchFamily="34" charset="-122"/>
-                          <a:cs typeface="Arial" pitchFamily="34" charset="-120"/>
-                        </a:rPr>
-                        <a:t>清潔感</a:t>
-                      </a:r>
-                      <a:endParaRPr lang="en-US" sz="900" dirty="0">
-                        <a:latin typeface="Arial" charset="0"/>
-                        <a:ea typeface="Arial" charset="0"/>
-                        <a:cs typeface="Arial" charset="0"/>
-                      </a:endParaRPr>
-                    </a:p>
-                  </a:txBody>
-                  <a:tcPr marL="91440" marR="91440" marT="45720" marB="45720">
-                    <a:lnL w="6350" cap="flat" cmpd="sng" algn="ctr">
-                      <a:solidFill>
-                        <a:srgbClr val="CBD5E1"/>
-                      </a:solidFill>
-                      <a:prstDash val="solid"/>
-                      <a:round/>
-                      <a:headEnd type="none" w="med" len="med"/>
-                      <a:tailEnd type="none" w="med" len="med"/>
-                    </a:lnL>
-                    <a:lnR w="6350" cap="flat" cmpd="sng" algn="ctr">
-                      <a:solidFill>
-                        <a:srgbClr val="CBD5E1"/>
-                      </a:solidFill>
-                      <a:prstDash val="solid"/>
-                      <a:round/>
-                      <a:headEnd type="none" w="med" len="med"/>
-                      <a:tailEnd type="none" w="med" len="med"/>
-                    </a:lnR>
-                    <a:lnT w="6350" cap="flat" cmpd="sng" algn="ctr">
-                      <a:solidFill>
-                        <a:srgbClr val="CBD5E1"/>
-                      </a:solidFill>
-                      <a:prstDash val="solid"/>
-                      <a:round/>
-                      <a:headEnd type="none" w="med" len="med"/>
-                      <a:tailEnd type="none" w="med" len="med"/>
-                    </a:lnT>
-                    <a:lnB w="6350" cap="flat" cmpd="sng" algn="ctr">
-                      <a:solidFill>
-                        <a:srgbClr val="CBD5E1"/>
-                      </a:solidFill>
-                      <a:prstDash val="solid"/>
-                      <a:round/>
-                      <a:headEnd type="none" w="med" len="med"/>
-                      <a:tailEnd type="none" w="med" len="med"/>
-                    </a:lnB>
-                    <a:solidFill>
-                      <a:srgbClr val="E8EFF8"/>
-                    </a:solidFill>
-                  </a:tcPr>
-                </a:tc>
-                <a:tc>
-                  <a:txBody>
-                    <a:bodyPr/>
-                    <a:lstStyle/>
-                    <a:p>
-                      <a:pPr indent="0" marL="0">
-                        <a:buNone/>
-                      </a:pPr>
-                      <a:r>
-                        <a:rPr lang="en-US" sz="900" dirty="0">
-                          <a:solidFill>
-                            <a:srgbClr val="64748B"/>
-                          </a:solidFill>
-                          <a:latin typeface="Arial" pitchFamily="34" charset="0"/>
-                          <a:ea typeface="Arial" pitchFamily="34" charset="-122"/>
-                          <a:cs typeface="Arial" pitchFamily="34" charset="-120"/>
-                        </a:rPr>
-                        <a:t>排水口付近の浴槽にカビが生えている</a:t>
-                      </a:r>
-                      <a:endParaRPr lang="en-US" sz="900" dirty="0">
-                        <a:latin typeface="Arial" charset="0"/>
-                        <a:ea typeface="Arial" charset="0"/>
-                        <a:cs typeface="Arial" charset="0"/>
-                      </a:endParaRPr>
-                    </a:p>
-                  </a:txBody>
-                  <a:tcPr marL="91440" marR="91440" marT="45720" marB="45720">
-                    <a:lnL w="6350" cap="flat" cmpd="sng" algn="ctr">
-                      <a:solidFill>
-                        <a:srgbClr val="CBD5E1"/>
-                      </a:solidFill>
-                      <a:prstDash val="solid"/>
-                      <a:round/>
-                      <a:headEnd type="none" w="med" len="med"/>
-                      <a:tailEnd type="none" w="med" len="med"/>
-                    </a:lnL>
-                    <a:lnR w="6350" cap="flat" cmpd="sng" algn="ctr">
-                      <a:solidFill>
-                        <a:srgbClr val="CBD5E1"/>
-                      </a:solidFill>
-                      <a:prstDash val="solid"/>
-                      <a:round/>
-                      <a:headEnd type="none" w="med" len="med"/>
-                      <a:tailEnd type="none" w="med" len="med"/>
-                    </a:lnR>
-                    <a:lnT w="6350" cap="flat" cmpd="sng" algn="ctr">
-                      <a:solidFill>
-                        <a:srgbClr val="CBD5E1"/>
-                      </a:solidFill>
-                      <a:prstDash val="solid"/>
-                      <a:round/>
-                      <a:headEnd type="none" w="med" len="med"/>
-                      <a:tailEnd type="none" w="med" len="med"/>
-                    </a:lnT>
-                    <a:lnB w="6350" cap="flat" cmpd="sng" algn="ctr">
-                      <a:solidFill>
-                        <a:srgbClr val="CBD5E1"/>
-                      </a:solidFill>
-                      <a:prstDash val="solid"/>
-                      <a:round/>
-                      <a:headEnd type="none" w="med" len="med"/>
-                      <a:tailEnd type="none" w="med" len="med"/>
-                    </a:lnB>
-                    <a:solidFill>
-                      <a:srgbClr val="E8EFF8"/>
-                    </a:solidFill>
-                  </a:tcPr>
-                </a:tc>
-                <a:tc>
-                  <a:txBody>
-                    <a:bodyPr/>
-                    <a:lstStyle/>
-                    <a:p>
-                      <a:pPr algn="ctr" indent="0" marL="0">
-                        <a:buNone/>
-                      </a:pPr>
-                      <a:r>
-                        <a:rPr lang="en-US" sz="900" dirty="0">
-                          <a:solidFill>
-                            <a:srgbClr val="334155"/>
-                          </a:solidFill>
-                          <a:latin typeface="Arial" pitchFamily="34" charset="0"/>
-                          <a:ea typeface="Arial" pitchFamily="34" charset="-122"/>
-                          <a:cs typeface="Arial" pitchFamily="34" charset="-120"/>
-                        </a:rPr>
-                        <a:t>1件</a:t>
-                      </a:r>
-                      <a:endParaRPr lang="en-US" sz="900" dirty="0">
-                        <a:latin typeface="Arial" charset="0"/>
-                        <a:ea typeface="Arial" charset="0"/>
-                        <a:cs typeface="Arial" charset="0"/>
-                      </a:endParaRPr>
-                    </a:p>
-                  </a:txBody>
-                  <a:tcPr marL="91440" marR="91440" marT="45720" marB="45720">
-                    <a:lnL w="6350" cap="flat" cmpd="sng" algn="ctr">
-                      <a:solidFill>
-                        <a:srgbClr val="CBD5E1"/>
-                      </a:solidFill>
-                      <a:prstDash val="solid"/>
-                      <a:round/>
-                      <a:headEnd type="none" w="med" len="med"/>
-                      <a:tailEnd type="none" w="med" len="med"/>
-                    </a:lnL>
-                    <a:lnR w="6350" cap="flat" cmpd="sng" algn="ctr">
-                      <a:solidFill>
-                        <a:srgbClr val="CBD5E1"/>
-                      </a:solidFill>
-                      <a:prstDash val="solid"/>
-                      <a:round/>
-                      <a:headEnd type="none" w="med" len="med"/>
-                      <a:tailEnd type="none" w="med" len="med"/>
-                    </a:lnR>
-                    <a:lnT w="6350" cap="flat" cmpd="sng" algn="ctr">
-                      <a:solidFill>
-                        <a:srgbClr val="CBD5E1"/>
-                      </a:solidFill>
-                      <a:prstDash val="solid"/>
-                      <a:round/>
-                      <a:headEnd type="none" w="med" len="med"/>
-                      <a:tailEnd type="none" w="med" len="med"/>
-                    </a:lnT>
-                    <a:lnB w="6350" cap="flat" cmpd="sng" algn="ctr">
-                      <a:solidFill>
-                        <a:srgbClr val="CBD5E1"/>
-                      </a:solidFill>
-                      <a:prstDash val="solid"/>
-                      <a:round/>
-                      <a:headEnd type="none" w="med" len="med"/>
-                      <a:tailEnd type="none" w="med" len="med"/>
-                    </a:lnB>
-                    <a:solidFill>
-                      <a:srgbClr val="E8EFF8"/>
-                    </a:solidFill>
-                  </a:tcPr>
-                </a:tc>
-              </a:tr>
-              <a:tr h="320040">
-                <a:tc>
-                  <a:txBody>
-                    <a:bodyPr/>
-                    <a:lstStyle/>
-                    <a:p>
-                      <a:pPr algn="ctr" indent="0" marL="0">
-                        <a:buNone/>
-                      </a:pPr>
-                      <a:r>
-                        <a:rPr lang="en-US" sz="1200" b="1" dirty="0">
-                          <a:solidFill>
-                            <a:srgbClr val="D4A843"/>
-                          </a:solidFill>
-                          <a:latin typeface="Arial" pitchFamily="34" charset="0"/>
-                          <a:ea typeface="Arial" pitchFamily="34" charset="-122"/>
-                          <a:cs typeface="Arial" pitchFamily="34" charset="-120"/>
-                        </a:rPr>
-                        <a:t>B</a:t>
-                      </a:r>
-                      <a:endParaRPr lang="en-US" sz="1200" dirty="0">
-                        <a:latin typeface="Arial" charset="0"/>
-                        <a:ea typeface="Arial" charset="0"/>
-                        <a:cs typeface="Arial" charset="0"/>
-                      </a:endParaRPr>
-                    </a:p>
-                  </a:txBody>
-                  <a:tcPr marL="91440" marR="91440" marT="45720" marB="45720">
-                    <a:lnL w="6350" cap="flat" cmpd="sng" algn="ctr">
-                      <a:solidFill>
-                        <a:srgbClr val="CBD5E1"/>
-                      </a:solidFill>
-                      <a:prstDash val="solid"/>
-                      <a:round/>
-                      <a:headEnd type="none" w="med" len="med"/>
-                      <a:tailEnd type="none" w="med" len="med"/>
-                    </a:lnL>
-                    <a:lnR w="6350" cap="flat" cmpd="sng" algn="ctr">
-                      <a:solidFill>
-                        <a:srgbClr val="CBD5E1"/>
-                      </a:solidFill>
-                      <a:prstDash val="solid"/>
-                      <a:round/>
-                      <a:headEnd type="none" w="med" len="med"/>
-                      <a:tailEnd type="none" w="med" len="med"/>
-                    </a:lnR>
-                    <a:lnT w="6350" cap="flat" cmpd="sng" algn="ctr">
-                      <a:solidFill>
-                        <a:srgbClr val="CBD5E1"/>
-                      </a:solidFill>
-                      <a:prstDash val="solid"/>
-                      <a:round/>
-                      <a:headEnd type="none" w="med" len="med"/>
-                      <a:tailEnd type="none" w="med" len="med"/>
-                    </a:lnT>
-                    <a:lnB w="6350" cap="flat" cmpd="sng" algn="ctr">
-                      <a:solidFill>
-                        <a:srgbClr val="CBD5E1"/>
-                      </a:solidFill>
-                      <a:prstDash val="solid"/>
-                      <a:round/>
-                      <a:headEnd type="none" w="med" len="med"/>
-                      <a:tailEnd type="none" w="med" len="med"/>
-                    </a:lnB>
-                    <a:solidFill>
-                      <a:srgbClr val="FFFFFF"/>
-                    </a:solidFill>
-                  </a:tcPr>
-                </a:tc>
-                <a:tc>
-                  <a:txBody>
-                    <a:bodyPr/>
-                    <a:lstStyle/>
-                    <a:p>
-                      <a:pPr indent="0" marL="0">
-                        <a:buNone/>
-                      </a:pPr>
-                      <a:r>
-                        <a:rPr lang="en-US" sz="900" b="1" dirty="0">
-                          <a:solidFill>
-                            <a:srgbClr val="334155"/>
-                          </a:solidFill>
-                          <a:latin typeface="Arial" pitchFamily="34" charset="0"/>
-                          <a:ea typeface="Arial" pitchFamily="34" charset="-122"/>
-                          <a:cs typeface="Arial" pitchFamily="34" charset="-120"/>
-                        </a:rPr>
-                        <a:t>駐車場・立地</a:t>
-                      </a:r>
-                      <a:endParaRPr lang="en-US" sz="900" dirty="0">
-                        <a:latin typeface="Arial" charset="0"/>
-                        <a:ea typeface="Arial" charset="0"/>
-                        <a:cs typeface="Arial" charset="0"/>
-                      </a:endParaRPr>
-                    </a:p>
-                  </a:txBody>
-                  <a:tcPr marL="91440" marR="91440" marT="45720" marB="45720">
-                    <a:lnL w="6350" cap="flat" cmpd="sng" algn="ctr">
-                      <a:solidFill>
-                        <a:srgbClr val="CBD5E1"/>
-                      </a:solidFill>
-                      <a:prstDash val="solid"/>
-                      <a:round/>
-                      <a:headEnd type="none" w="med" len="med"/>
-                      <a:tailEnd type="none" w="med" len="med"/>
-                    </a:lnL>
-                    <a:lnR w="6350" cap="flat" cmpd="sng" algn="ctr">
-                      <a:solidFill>
-                        <a:srgbClr val="CBD5E1"/>
-                      </a:solidFill>
-                      <a:prstDash val="solid"/>
-                      <a:round/>
-                      <a:headEnd type="none" w="med" len="med"/>
-                      <a:tailEnd type="none" w="med" len="med"/>
-                    </a:lnR>
-                    <a:lnT w="6350" cap="flat" cmpd="sng" algn="ctr">
-                      <a:solidFill>
-                        <a:srgbClr val="CBD5E1"/>
-                      </a:solidFill>
-                      <a:prstDash val="solid"/>
-                      <a:round/>
-                      <a:headEnd type="none" w="med" len="med"/>
-                      <a:tailEnd type="none" w="med" len="med"/>
-                    </a:lnT>
-                    <a:lnB w="6350" cap="flat" cmpd="sng" algn="ctr">
-                      <a:solidFill>
-                        <a:srgbClr val="CBD5E1"/>
-                      </a:solidFill>
-                      <a:prstDash val="solid"/>
-                      <a:round/>
-                      <a:headEnd type="none" w="med" len="med"/>
-                      <a:tailEnd type="none" w="med" len="med"/>
-                    </a:lnB>
-                    <a:solidFill>
-                      <a:srgbClr val="FFFFFF"/>
-                    </a:solidFill>
-                  </a:tcPr>
-                </a:tc>
-                <a:tc>
-                  <a:txBody>
-                    <a:bodyPr/>
-                    <a:lstStyle/>
-                    <a:p>
-                      <a:pPr indent="0" marL="0">
-                        <a:buNone/>
-                      </a:pPr>
-                      <a:r>
-                        <a:rPr lang="en-US" sz="900" dirty="0">
-                          <a:solidFill>
-                            <a:srgbClr val="64748B"/>
-                          </a:solidFill>
-                          <a:latin typeface="Arial" pitchFamily="34" charset="0"/>
-                          <a:ea typeface="Arial" pitchFamily="34" charset="-122"/>
-                          <a:cs typeface="Arial" pitchFamily="34" charset="-120"/>
-                        </a:rPr>
-                        <a:t>私のように名前が長い場合（名字が3つと長い姓が1つ）、自動チェックイン機能は全く</a:t>
-                      </a:r>
-                      <a:endParaRPr lang="en-US" sz="900" dirty="0">
-                        <a:latin typeface="Arial" charset="0"/>
-                        <a:ea typeface="Arial" charset="0"/>
-                        <a:cs typeface="Arial" charset="0"/>
-                      </a:endParaRPr>
-                    </a:p>
-                  </a:txBody>
-                  <a:tcPr marL="91440" marR="91440" marT="45720" marB="45720">
-                    <a:lnL w="6350" cap="flat" cmpd="sng" algn="ctr">
-                      <a:solidFill>
-                        <a:srgbClr val="CBD5E1"/>
-                      </a:solidFill>
-                      <a:prstDash val="solid"/>
-                      <a:round/>
-                      <a:headEnd type="none" w="med" len="med"/>
-                      <a:tailEnd type="none" w="med" len="med"/>
-                    </a:lnL>
-                    <a:lnR w="6350" cap="flat" cmpd="sng" algn="ctr">
-                      <a:solidFill>
-                        <a:srgbClr val="CBD5E1"/>
-                      </a:solidFill>
-                      <a:prstDash val="solid"/>
-                      <a:round/>
-                      <a:headEnd type="none" w="med" len="med"/>
-                      <a:tailEnd type="none" w="med" len="med"/>
-                    </a:lnR>
-                    <a:lnT w="6350" cap="flat" cmpd="sng" algn="ctr">
-                      <a:solidFill>
-                        <a:srgbClr val="CBD5E1"/>
-                      </a:solidFill>
-                      <a:prstDash val="solid"/>
-                      <a:round/>
-                      <a:headEnd type="none" w="med" len="med"/>
-                      <a:tailEnd type="none" w="med" len="med"/>
-                    </a:lnT>
-                    <a:lnB w="6350" cap="flat" cmpd="sng" algn="ctr">
-                      <a:solidFill>
-                        <a:srgbClr val="CBD5E1"/>
-                      </a:solidFill>
-                      <a:prstDash val="solid"/>
-                      <a:round/>
-                      <a:headEnd type="none" w="med" len="med"/>
-                      <a:tailEnd type="none" w="med" len="med"/>
-                    </a:lnB>
-                    <a:solidFill>
-                      <a:srgbClr val="FFFFFF"/>
-                    </a:solidFill>
-                  </a:tcPr>
-                </a:tc>
-                <a:tc>
-                  <a:txBody>
-                    <a:bodyPr/>
-                    <a:lstStyle/>
-                    <a:p>
-                      <a:pPr algn="ctr" indent="0" marL="0">
-                        <a:buNone/>
-                      </a:pPr>
-                      <a:r>
-                        <a:rPr lang="en-US" sz="900" dirty="0">
-                          <a:solidFill>
-                            <a:srgbClr val="334155"/>
-                          </a:solidFill>
-                          <a:latin typeface="Arial" pitchFamily="34" charset="0"/>
-                          <a:ea typeface="Arial" pitchFamily="34" charset="-122"/>
-                          <a:cs typeface="Arial" pitchFamily="34" charset="-120"/>
-                        </a:rPr>
-                        <a:t>1件</a:t>
-                      </a:r>
-                      <a:endParaRPr lang="en-US" sz="900" dirty="0">
-                        <a:latin typeface="Arial" charset="0"/>
-                        <a:ea typeface="Arial" charset="0"/>
-                        <a:cs typeface="Arial" charset="0"/>
-                      </a:endParaRPr>
-                    </a:p>
-                  </a:txBody>
-                  <a:tcPr marL="91440" marR="91440" marT="45720" marB="45720">
-                    <a:lnL w="6350" cap="flat" cmpd="sng" algn="ctr">
-                      <a:solidFill>
-                        <a:srgbClr val="CBD5E1"/>
-                      </a:solidFill>
-                      <a:prstDash val="solid"/>
-                      <a:round/>
-                      <a:headEnd type="none" w="med" len="med"/>
-                      <a:tailEnd type="none" w="med" len="med"/>
-                    </a:lnL>
-                    <a:lnR w="6350" cap="flat" cmpd="sng" algn="ctr">
-                      <a:solidFill>
-                        <a:srgbClr val="CBD5E1"/>
-                      </a:solidFill>
-                      <a:prstDash val="solid"/>
-                      <a:round/>
-                      <a:headEnd type="none" w="med" len="med"/>
-                      <a:tailEnd type="none" w="med" len="med"/>
-                    </a:lnR>
-                    <a:lnT w="6350" cap="flat" cmpd="sng" algn="ctr">
-                      <a:solidFill>
-                        <a:srgbClr val="CBD5E1"/>
-                      </a:solidFill>
-                      <a:prstDash val="solid"/>
-                      <a:round/>
-                      <a:headEnd type="none" w="med" len="med"/>
-                      <a:tailEnd type="none" w="med" len="med"/>
-                    </a:lnT>
-                    <a:lnB w="6350" cap="flat" cmpd="sng" algn="ctr">
-                      <a:solidFill>
-                        <a:srgbClr val="CBD5E1"/>
-                      </a:solidFill>
-                      <a:prstDash val="solid"/>
-                      <a:round/>
-                      <a:headEnd type="none" w="med" len="med"/>
-                      <a:tailEnd type="none" w="med" len="med"/>
-                    </a:lnB>
-                    <a:solidFill>
-                      <a:srgbClr val="FFFFFF"/>
-                    </a:solidFill>
-                  </a:tcPr>
-                </a:tc>
-              </a:tr>
             </a:tbl>
           </a:graphicData>
         </a:graphic>
@@ -12498,7 +11950,7 @@
                 <a:ea typeface="Arial" pitchFamily="34" charset="-122"/>
                 <a:cs typeface="Arial" pitchFamily="34" charset="-120"/>
               </a:rPr>
-              <a:t>(4) 部屋利用満足度の最大化</a:t>
+              <a:t>(4) 口コミ返信率100%の実現</a:t>
             </a:r>
             <a:endParaRPr lang="en-US" sz="1200" dirty="0"/>
           </a:p>
@@ -12541,7 +11993,7 @@
                 <a:ea typeface="Arial" pitchFamily="34" charset="-122"/>
                 <a:cs typeface="Arial" pitchFamily="34" charset="-120"/>
               </a:rPr>
-              <a:t>収納スペースの整理・最適化</a:t>
+              <a:t>全OTAサイトの口コミへの返信ルール策定（48時間以内）</a:t>
             </a:r>
             <a:endParaRPr lang="en-US" sz="900" dirty="0"/>
           </a:p>
@@ -12562,7 +12014,7 @@
                 <a:ea typeface="Arial" pitchFamily="34" charset="-122"/>
                 <a:cs typeface="Arial" pitchFamily="34" charset="-120"/>
               </a:rPr>
-              <a:t>荷物預かりサービスの案内強化</a:t>
+              <a:t>ネガティブ口コミへの丁寧な対応テンプレート作成</a:t>
             </a:r>
             <a:endParaRPr lang="en-US" sz="900" dirty="0"/>
           </a:p>
@@ -12583,28 +12035,7 @@
                 <a:ea typeface="Arial" pitchFamily="34" charset="-122"/>
                 <a:cs typeface="Arial" pitchFamily="34" charset="-120"/>
               </a:rPr>
-              <a:t>部屋タイプ別の使い勝手改善ガイド作成</a:t>
-            </a:r>
-            <a:endParaRPr lang="en-US" sz="900" dirty="0"/>
-          </a:p>
-          <a:p>
-            <a:pPr marL="342900" indent="-342900">
-              <a:spcAft>
-                <a:spcPts val="300"/>
-              </a:spcAft>
-              <a:buSzPct val="100000"/>
-              <a:buChar char="•"/>
-            </a:pPr>
-            <a:r>
-              <a:rPr lang="en-US" sz="900" dirty="0">
-                <a:solidFill>
-                  <a:srgbClr val="334155"/>
-                </a:solidFill>
-                <a:latin typeface="Arial" pitchFamily="34" charset="0"/>
-                <a:ea typeface="Arial" pitchFamily="34" charset="-122"/>
-                <a:cs typeface="Arial" pitchFamily="34" charset="-120"/>
-              </a:rPr>
-              <a:t>コンパクトな部屋の魅力を訴求するOTA説明文改訂</a:t>
+              <a:t>フロントマネージャーによる週次口コミモニタリング</a:t>
             </a:r>
             <a:endParaRPr lang="en-US" sz="900" dirty="0"/>
           </a:p>
@@ -14370,7 +13801,7 @@
                           <a:ea typeface="Arial" pitchFamily="34" charset="-122"/>
                           <a:cs typeface="Arial" pitchFamily="34" charset="-120"/>
                         </a:rPr>
-                        <a:t>8.31点</a:t>
+                        <a:t>8.35点</a:t>
                       </a:r>
                       <a:endParaRPr lang="en-US" sz="1000" dirty="0">
                         <a:latin typeface="Arial" charset="0"/>
@@ -14438,7 +13869,7 @@
                           <a:ea typeface="Arial" pitchFamily="34" charset="-122"/>
                           <a:cs typeface="Arial" pitchFamily="34" charset="-120"/>
                         </a:rPr>
-                        <a:t>8.6点以上</a:t>
+                        <a:t>8.7点以上</a:t>
                       </a:r>
                       <a:endParaRPr lang="en-US" sz="1000" dirty="0">
                         <a:latin typeface="Arial" charset="0"/>
@@ -14644,7 +14075,7 @@
                           <a:ea typeface="Arial" pitchFamily="34" charset="-122"/>
                           <a:cs typeface="Arial" pitchFamily="34" charset="-120"/>
                         </a:rPr>
-                        <a:t>76.6%</a:t>
+                        <a:t>76.8%</a:t>
                       </a:r>
                       <a:endParaRPr lang="en-US" sz="1000" dirty="0">
                         <a:latin typeface="Arial" charset="0"/>
@@ -14918,7 +14349,7 @@
                           <a:ea typeface="Arial" pitchFamily="34" charset="-122"/>
                           <a:cs typeface="Arial" pitchFamily="34" charset="-120"/>
                         </a:rPr>
-                        <a:t>3.1%</a:t>
+                        <a:t>4.3%</a:t>
                       </a:r>
                       <a:endParaRPr lang="en-US" sz="1000" dirty="0">
                         <a:latin typeface="Arial" charset="0"/>
@@ -14986,7 +14417,7 @@
                           <a:ea typeface="Arial" pitchFamily="34" charset="-122"/>
                           <a:cs typeface="Arial" pitchFamily="34" charset="-120"/>
                         </a:rPr>
-                        <a:t>2.1%以下</a:t>
+                        <a:t>3.3%以下</a:t>
                       </a:r>
                       <a:endParaRPr lang="en-US" sz="1000" dirty="0">
                         <a:latin typeface="Arial" charset="0"/>
@@ -15466,7 +14897,7 @@
                           <a:ea typeface="Arial" pitchFamily="34" charset="-122"/>
                           <a:cs typeface="Arial" pitchFamily="34" charset="-120"/>
                         </a:rPr>
-                        <a:t>9.40/10点</a:t>
+                        <a:t>9.56/10点</a:t>
                       </a:r>
                       <a:endParaRPr lang="en-US" sz="1000" dirty="0">
                         <a:latin typeface="Arial" charset="0"/>
@@ -15534,7 +14965,7 @@
                           <a:ea typeface="Arial" pitchFamily="34" charset="-122"/>
                           <a:cs typeface="Arial" pitchFamily="34" charset="-120"/>
                         </a:rPr>
-                        <a:t>9.6/10点以上</a:t>
+                        <a:t>9.8/10点以上</a:t>
                       </a:r>
                       <a:endParaRPr lang="en-US" sz="1000" dirty="0">
                         <a:latin typeface="Arial" charset="0"/>
@@ -15672,7 +15103,7 @@
                           <a:ea typeface="Arial" pitchFamily="34" charset="-122"/>
                           <a:cs typeface="Arial" pitchFamily="34" charset="-120"/>
                         </a:rPr>
-                        <a:t>楽天トラベル評価</a:t>
+                        <a:t>じゃらん評価</a:t>
                       </a:r>
                       <a:endParaRPr lang="en-US" sz="1000" dirty="0">
                         <a:latin typeface="Arial" charset="0"/>
@@ -15740,7 +15171,7 @@
                           <a:ea typeface="Arial" pitchFamily="34" charset="-122"/>
                           <a:cs typeface="Arial" pitchFamily="34" charset="-120"/>
                         </a:rPr>
-                        <a:t>4.29/5点</a:t>
+                        <a:t>4.38/5点</a:t>
                       </a:r>
                       <a:endParaRPr lang="en-US" sz="1000" dirty="0">
                         <a:latin typeface="Arial" charset="0"/>
@@ -15808,7 +15239,7 @@
                           <a:ea typeface="Arial" pitchFamily="34" charset="-122"/>
                           <a:cs typeface="Arial" pitchFamily="34" charset="-120"/>
                         </a:rPr>
-                        <a:t>4.5/5点以上</a:t>
+                        <a:t>4.6/5点以上</a:t>
                       </a:r>
                       <a:endParaRPr lang="en-US" sz="1000" dirty="0">
                         <a:latin typeface="Arial" charset="0"/>
